--- a/TimeEats_Portefeuille_DSI.pptx
+++ b/TimeEats_Portefeuille_DSI.pptx
@@ -5571,7 +5571,7 @@
                   </a:tcPr>
                 </a:tc>
               </a:tr>
-              <a:tr h="475488">
+              <a:tr h="516636">
                 <a:tc>
                   <a:txBody>
                     <a:bodyPr/>
@@ -5777,7 +5777,7 @@
                   </a:tcPr>
                 </a:tc>
               </a:tr>
-              <a:tr h="475488">
+              <a:tr h="516636">
                 <a:tc>
                   <a:txBody>
                     <a:bodyPr/>
@@ -5983,7 +5983,7 @@
                   </a:tcPr>
                 </a:tc>
               </a:tr>
-              <a:tr h="475488">
+              <a:tr h="516636">
                 <a:tc>
                   <a:txBody>
                     <a:bodyPr/>
@@ -6189,7 +6189,7 @@
                   </a:tcPr>
                 </a:tc>
               </a:tr>
-              <a:tr h="475488">
+              <a:tr h="516636">
                 <a:tc>
                   <a:txBody>
                     <a:bodyPr/>
@@ -6601,7 +6601,7 @@
                   </a:tcPr>
                 </a:tc>
               </a:tr>
-              <a:tr h="475488">
+              <a:tr h="516636">
                 <a:tc>
                   <a:txBody>
                     <a:bodyPr/>
@@ -7289,7 +7289,7 @@
                   </a:tcPr>
                 </a:tc>
               </a:tr>
-              <a:tr h="475488">
+              <a:tr h="516636">
                 <a:tc>
                   <a:txBody>
                     <a:bodyPr/>
@@ -7701,7 +7701,7 @@
                   </a:tcPr>
                 </a:tc>
               </a:tr>
-              <a:tr h="475488">
+              <a:tr h="516636">
                 <a:tc>
                   <a:txBody>
                     <a:bodyPr/>
@@ -7907,7 +7907,7 @@
                   </a:tcPr>
                 </a:tc>
               </a:tr>
-              <a:tr h="475488">
+              <a:tr h="516636">
                 <a:tc>
                   <a:txBody>
                     <a:bodyPr/>
@@ -8331,7 +8331,7 @@
         </p:nvSpPr>
         <p:spPr>
           <a:xfrm>
-            <a:off x="640080" y="5440680"/>
+            <a:off x="640080" y="5639105"/>
             <a:ext cx="10911535" cy="457200"/>
           </a:xfrm>
           <a:prstGeom prst="rect">
@@ -9122,7 +9122,7 @@
                   </a:tcPr>
                 </a:tc>
               </a:tr>
-              <a:tr h="658368">
+              <a:tr h="692658">
                 <a:tc>
                   <a:txBody>
                     <a:bodyPr/>
@@ -11524,7 +11524,7 @@
         </p:nvSpPr>
         <p:spPr>
           <a:xfrm>
-            <a:off x="640080" y="6035040"/>
+            <a:off x="640080" y="6382055"/>
             <a:ext cx="10911535" cy="457200"/>
           </a:xfrm>
           <a:prstGeom prst="rect">
@@ -13557,7 +13557,7 @@
         </p:nvSpPr>
         <p:spPr>
           <a:xfrm>
-            <a:off x="640080" y="5806440"/>
+            <a:off x="640080" y="6265926"/>
             <a:ext cx="10911535" cy="457200"/>
           </a:xfrm>
           <a:prstGeom prst="rect">
@@ -15523,7 +15523,7 @@
         </p:nvSpPr>
         <p:spPr>
           <a:xfrm>
-            <a:off x="640080" y="5623560"/>
+            <a:off x="640080" y="6133795"/>
             <a:ext cx="10911535" cy="548640"/>
           </a:xfrm>
           <a:prstGeom prst="rect">
@@ -22560,7 +22560,7 @@
         </p:nvSpPr>
         <p:spPr>
           <a:xfrm>
-            <a:off x="640080" y="5212080"/>
+            <a:off x="640080" y="5538521"/>
             <a:ext cx="10911535" cy="365760"/>
           </a:xfrm>
           <a:prstGeom prst="rect">
@@ -29574,7 +29574,7 @@
         </p:nvSpPr>
         <p:spPr>
           <a:xfrm>
-            <a:off x="640080" y="6172200"/>
+            <a:off x="640080" y="5950001"/>
             <a:ext cx="10911535" cy="365760"/>
           </a:xfrm>
           <a:prstGeom prst="rect">
@@ -31960,12 +31960,12 @@
         </p:nvSpPr>
         <p:spPr>
           <a:xfrm>
-            <a:off x="4715762" y="4526280"/>
-            <a:ext cx="6835853" cy="1508760"/>
+            <a:off x="4715762" y="5122469"/>
+            <a:ext cx="6835853" cy="1232611"/>
           </a:xfrm>
           <a:prstGeom prst="roundRect">
             <a:avLst>
-              <a:gd name="adj" fmla="val 5455"/>
+              <a:gd name="adj" fmla="val 6677"/>
             </a:avLst>
           </a:prstGeom>
           <a:solidFill>
@@ -31982,8 +31982,8 @@
         </p:nvSpPr>
         <p:spPr>
           <a:xfrm>
-            <a:off x="4990082" y="4690872"/>
-            <a:ext cx="6287213" cy="1179576"/>
+            <a:off x="4990082" y="5287061"/>
+            <a:ext cx="6287213" cy="903427"/>
           </a:xfrm>
           <a:prstGeom prst="rect">
             <a:avLst/>
@@ -32293,7 +32293,7 @@
                 <a:gridCol w="914400"/>
                 <a:gridCol w="822960"/>
               </a:tblGrid>
-              <a:tr h="264262">
+              <a:tr h="305562">
                 <a:tc>
                   <a:txBody>
                     <a:bodyPr/>
@@ -32771,7 +32771,7 @@
                   </a:tcPr>
                 </a:tc>
               </a:tr>
-              <a:tr h="310896">
+              <a:tr h="340614">
                 <a:tc>
                   <a:txBody>
                     <a:bodyPr/>
@@ -33249,7 +33249,7 @@
                   </a:tcPr>
                 </a:tc>
               </a:tr>
-              <a:tr h="310896">
+              <a:tr h="340614">
                 <a:tc>
                   <a:txBody>
                     <a:bodyPr/>
@@ -33727,7 +33727,7 @@
                   </a:tcPr>
                 </a:tc>
               </a:tr>
-              <a:tr h="310896">
+              <a:tr h="340614">
                 <a:tc>
                   <a:txBody>
                     <a:bodyPr/>
@@ -34205,7 +34205,7 @@
                   </a:tcPr>
                 </a:tc>
               </a:tr>
-              <a:tr h="310896">
+              <a:tr h="340614">
                 <a:tc>
                   <a:txBody>
                     <a:bodyPr/>
@@ -34683,7 +34683,7 @@
                   </a:tcPr>
                 </a:tc>
               </a:tr>
-              <a:tr h="310896">
+              <a:tr h="340614">
                 <a:tc>
                   <a:txBody>
                     <a:bodyPr/>
@@ -35161,7 +35161,7 @@
                   </a:tcPr>
                 </a:tc>
               </a:tr>
-              <a:tr h="310896">
+              <a:tr h="340614">
                 <a:tc>
                   <a:txBody>
                     <a:bodyPr/>
@@ -35639,7 +35639,7 @@
                   </a:tcPr>
                 </a:tc>
               </a:tr>
-              <a:tr h="310896">
+              <a:tr h="340614">
                 <a:tc>
                   <a:txBody>
                     <a:bodyPr/>
@@ -36117,7 +36117,7 @@
                   </a:tcPr>
                 </a:tc>
               </a:tr>
-              <a:tr h="310896">
+              <a:tr h="340614">
                 <a:tc>
                   <a:txBody>
                     <a:bodyPr/>
@@ -36595,7 +36595,7 @@
                   </a:tcPr>
                 </a:tc>
               </a:tr>
-              <a:tr h="310896">
+              <a:tr h="340614">
                 <a:tc>
                   <a:txBody>
                     <a:bodyPr/>
@@ -37073,7 +37073,7 @@
                   </a:tcPr>
                 </a:tc>
               </a:tr>
-              <a:tr h="310896">
+              <a:tr h="340614">
                 <a:tc>
                   <a:txBody>
                     <a:bodyPr/>
@@ -37551,7 +37551,7 @@
                   </a:tcPr>
                 </a:tc>
               </a:tr>
-              <a:tr h="310896">
+              <a:tr h="340614">
                 <a:tc>
                   <a:txBody>
                     <a:bodyPr/>
@@ -38041,7 +38041,7 @@
         </p:nvSpPr>
         <p:spPr>
           <a:xfrm>
-            <a:off x="640080" y="5532120"/>
+            <a:off x="640080" y="6109716"/>
             <a:ext cx="10911535" cy="685800"/>
           </a:xfrm>
           <a:prstGeom prst="rect">
